--- a/tests/fixtures/samples/ia-industrial-intro.pptx
+++ b/tests/fixtures/samples/ia-industrial-intro.pptx
@@ -646,7 +646,7 @@
           <a:lstStyle/>
           <a:p>
             <a:r>
-              <a:t>Los casos de uso más maduros son el mantenimiento predictivo, la optimización energética y el control de calidad automatizado. Todos han demostrado retornos medibles en plantas industriales.</a:t>
+              <a:t>Los casos de uso más maduros son el mantenimiento predictivo, los asistentes generativos y el control de calidad automatizado. Todos han demostrado retornos medibles en plantas industriales.</a:t>
             </a:r>
           </a:p>
         </p:txBody>
@@ -3983,7 +3983,7 @@
           <a:p>
             <a:pPr/>
             <a:r>
-              <a:t>Optimización energética de plantas</a:t>
+              <a:t>Asistentes generativos para operarios</a:t>
             </a:r>
           </a:p>
           <a:p>
